--- a/courseware/DSA_CH10_Searching.pptx
+++ b/courseware/DSA_CH10_Searching.pptx
@@ -3322,7 +3322,7 @@
                 <a:latin typeface="Segoe UI"/>
                 <a:ea typeface="微软雅黑"/>
               </a:rPr>
-              <a:t>现代化重制版讲义　代码按 C++17 重写，全部可编译、可运行</a:t>
+              <a:t>现代化重制版讲义　代码按 C++17 重写；code/ 全部单元双档编译运行通过</a:t>
             </a:r>
           </a:p>
         </p:txBody>
@@ -13390,7 +13390,7 @@
                 <a:latin typeface="Segoe UI"/>
                 <a:ea typeface="微软雅黑"/>
               </a:rPr>
-              <a:t>习题（完整题面与参考答案见同名讲义）</a:t>
+              <a:t>习题选讲</a:t>
             </a:r>
           </a:p>
         </p:txBody>
@@ -13469,11 +13469,11 @@
                 <a:spcPts val="0"/>
               </a:spcBef>
               <a:spcAft>
-                <a:spcPts val="1240"/>
-              </a:spcAft>
-            </a:pPr>
-            <a:r>
-              <a:rPr sz="2000" b="0" i="0">
+                <a:spcPts val="1178"/>
+              </a:spcAft>
+            </a:pPr>
+            <a:r>
+              <a:rPr sz="1900" b="0" i="0">
                 <a:solidFill>
                   <a:srgbClr val="242A33"/>
                 </a:solidFill>
@@ -13483,7 +13483,7 @@
               <a:t>•  </a:t>
             </a:r>
             <a:r>
-              <a:rPr sz="2000" b="1" i="0">
+              <a:rPr sz="1900" b="1" i="0">
                 <a:solidFill>
                   <a:srgbClr val="12395B"/>
                 </a:solidFill>
@@ -13493,7 +13493,7 @@
               <a:t>二分</a:t>
             </a:r>
             <a:r>
-              <a:rPr sz="2000" b="0" i="0">
+              <a:rPr sz="1900" b="0" i="0">
                 <a:solidFill>
                   <a:srgbClr val="242A33"/>
                 </a:solidFill>
@@ -13503,7 +13503,7 @@
               <a:t>　写出查某个值的每一轮区间；说明</a:t>
             </a:r>
             <a:r>
-              <a:rPr sz="2000" b="1" i="0">
+              <a:rPr sz="1900" b="1" i="0">
                 <a:solidFill>
                   <a:srgbClr val="12395B"/>
                 </a:solidFill>
@@ -13513,7 +13513,7 @@
               <a:t>半开区间写法</a:t>
             </a:r>
             <a:r>
-              <a:rPr sz="2000" b="0" i="0">
+              <a:rPr sz="1900" b="0" i="0">
                 <a:solidFill>
                   <a:srgbClr val="242A33"/>
                 </a:solidFill>
@@ -13532,11 +13532,11 @@
                 <a:spcPts val="0"/>
               </a:spcBef>
               <a:spcAft>
-                <a:spcPts val="1240"/>
-              </a:spcAft>
-            </a:pPr>
-            <a:r>
-              <a:rPr sz="2000" b="0" i="0">
+                <a:spcPts val="1178"/>
+              </a:spcAft>
+            </a:pPr>
+            <a:r>
+              <a:rPr sz="1900" b="0" i="0">
                 <a:solidFill>
                   <a:srgbClr val="242A33"/>
                 </a:solidFill>
@@ -13546,7 +13546,7 @@
               <a:t>•  </a:t>
             </a:r>
             <a:r>
-              <a:rPr sz="2000" b="1" i="0">
+              <a:rPr sz="1900" b="1" i="0">
                 <a:solidFill>
                   <a:srgbClr val="12395B"/>
                 </a:solidFill>
@@ -13556,7 +13556,7 @@
               <a:t>分块</a:t>
             </a:r>
             <a:r>
-              <a:rPr sz="2000" b="0" i="0">
+              <a:rPr sz="1900" b="0" i="0">
                 <a:solidFill>
                   <a:srgbClr val="242A33"/>
                 </a:solidFill>
@@ -13566,7 +13566,7 @@
               <a:t>　推导 </a:t>
             </a:r>
             <a:r>
-              <a:rPr sz="1879" b="0" i="0">
+              <a:rPr sz="1786" b="0" i="0">
                 <a:solidFill>
                   <a:srgbClr val="242A33"/>
                 </a:solidFill>
@@ -13576,7 +13576,7 @@
               <a:t>s = √n</a:t>
             </a:r>
             <a:r>
-              <a:rPr sz="2000" b="0" i="0">
+              <a:rPr sz="1900" b="0" i="0">
                 <a:solidFill>
                   <a:srgbClr val="242A33"/>
                 </a:solidFill>
@@ -13595,11 +13595,11 @@
                 <a:spcPts val="0"/>
               </a:spcBef>
               <a:spcAft>
-                <a:spcPts val="1240"/>
-              </a:spcAft>
-            </a:pPr>
-            <a:r>
-              <a:rPr sz="2000" b="0" i="0">
+                <a:spcPts val="1178"/>
+              </a:spcAft>
+            </a:pPr>
+            <a:r>
+              <a:rPr sz="1900" b="0" i="0">
                 <a:solidFill>
                   <a:srgbClr val="242A33"/>
                 </a:solidFill>
@@ -13609,7 +13609,7 @@
               <a:t>•  </a:t>
             </a:r>
             <a:r>
-              <a:rPr sz="2000" b="1" i="0">
+              <a:rPr sz="1900" b="1" i="0">
                 <a:solidFill>
                   <a:srgbClr val="12395B"/>
                 </a:solidFill>
@@ -13619,7 +13619,7 @@
               <a:t>位向量</a:t>
             </a:r>
             <a:r>
-              <a:rPr sz="2000" b="0" i="0">
+              <a:rPr sz="1900" b="0" i="0">
                 <a:solidFill>
                   <a:srgbClr val="242A33"/>
                 </a:solidFill>
@@ -13629,7 +13629,7 @@
               <a:t>　用位运算实现交、并、差，并验证 </a:t>
             </a:r>
             <a:r>
-              <a:rPr sz="1879" b="0" i="0">
+              <a:rPr sz="1786" b="0" i="0">
                 <a:solidFill>
                   <a:srgbClr val="242A33"/>
                 </a:solidFill>
@@ -13639,7 +13639,7 @@
               <a:t>A ∩ B = B ∩ A</a:t>
             </a:r>
             <a:r>
-              <a:rPr sz="2000" b="0" i="0">
+              <a:rPr sz="1900" b="0" i="0">
                 <a:solidFill>
                   <a:srgbClr val="242A33"/>
                 </a:solidFill>
@@ -13658,11 +13658,11 @@
                 <a:spcPts val="0"/>
               </a:spcBef>
               <a:spcAft>
-                <a:spcPts val="1240"/>
-              </a:spcAft>
-            </a:pPr>
-            <a:r>
-              <a:rPr sz="2000" b="0" i="0">
+                <a:spcPts val="1178"/>
+              </a:spcAft>
+            </a:pPr>
+            <a:r>
+              <a:rPr sz="1900" b="0" i="0">
                 <a:solidFill>
                   <a:srgbClr val="242A33"/>
                 </a:solidFill>
@@ -13672,7 +13672,7 @@
               <a:t>•  </a:t>
             </a:r>
             <a:r>
-              <a:rPr sz="2000" b="1" i="0">
+              <a:rPr sz="1900" b="1" i="0">
                 <a:solidFill>
                   <a:srgbClr val="12395B"/>
                 </a:solidFill>
@@ -13682,7 +13682,7 @@
               <a:t>散列函数</a:t>
             </a:r>
             <a:r>
-              <a:rPr sz="2000" b="0" i="0">
+              <a:rPr sz="1900" b="0" i="0">
                 <a:solidFill>
                   <a:srgbClr val="242A33"/>
                 </a:solidFill>
@@ -13692,7 +13692,7 @@
               <a:t>　为什么除余法的 M 通常取质数？M 取 </a:t>
             </a:r>
             <a:r>
-              <a:rPr sz="1879" b="0" i="0">
+              <a:rPr sz="1786" b="0" i="0">
                 <a:solidFill>
                   <a:srgbClr val="242A33"/>
                 </a:solidFill>
@@ -13702,7 +13702,7 @@
               <a:t>2^k</a:t>
             </a:r>
             <a:r>
-              <a:rPr sz="2000" b="0" i="0">
+              <a:rPr sz="1900" b="0" i="0">
                 <a:solidFill>
                   <a:srgbClr val="242A33"/>
                 </a:solidFill>
@@ -13721,11 +13721,11 @@
                 <a:spcPts val="0"/>
               </a:spcBef>
               <a:spcAft>
-                <a:spcPts val="1240"/>
-              </a:spcAft>
-            </a:pPr>
-            <a:r>
-              <a:rPr sz="2000" b="0" i="0">
+                <a:spcPts val="1178"/>
+              </a:spcAft>
+            </a:pPr>
+            <a:r>
+              <a:rPr sz="1900" b="0" i="0">
                 <a:solidFill>
                   <a:srgbClr val="242A33"/>
                 </a:solidFill>
@@ -13735,7 +13735,7 @@
               <a:t>•  </a:t>
             </a:r>
             <a:r>
-              <a:rPr sz="2000" b="1" i="0">
+              <a:rPr sz="1900" b="1" i="0">
                 <a:solidFill>
                   <a:srgbClr val="12395B"/>
                 </a:solidFill>
@@ -13745,7 +13745,7 @@
               <a:t>聚集</a:t>
             </a:r>
             <a:r>
-              <a:rPr sz="2000" b="0" i="0">
+              <a:rPr sz="1900" b="0" i="0">
                 <a:solidFill>
                   <a:srgbClr val="242A33"/>
                 </a:solidFill>
@@ -13764,11 +13764,11 @@
                 <a:spcPts val="0"/>
               </a:spcBef>
               <a:spcAft>
-                <a:spcPts val="1240"/>
-              </a:spcAft>
-            </a:pPr>
-            <a:r>
-              <a:rPr sz="2000" b="0" i="0">
+                <a:spcPts val="1178"/>
+              </a:spcAft>
+            </a:pPr>
+            <a:r>
+              <a:rPr sz="1900" b="0" i="0">
                 <a:solidFill>
                   <a:srgbClr val="242A33"/>
                 </a:solidFill>
@@ -13778,7 +13778,7 @@
               <a:t>•  </a:t>
             </a:r>
             <a:r>
-              <a:rPr sz="2000" b="1" i="0">
+              <a:rPr sz="1900" b="1" i="0">
                 <a:solidFill>
                   <a:srgbClr val="12395B"/>
                 </a:solidFill>
@@ -13788,7 +13788,7 @@
               <a:t>墓碑</a:t>
             </a:r>
             <a:r>
-              <a:rPr sz="2000" b="0" i="0">
+              <a:rPr sz="1900" b="0" i="0">
                 <a:solidFill>
                   <a:srgbClr val="242A33"/>
                 </a:solidFill>
@@ -13807,11 +13807,11 @@
                 <a:spcPts val="0"/>
               </a:spcBef>
               <a:spcAft>
-                <a:spcPts val="1240"/>
-              </a:spcAft>
-            </a:pPr>
-            <a:r>
-              <a:rPr sz="2000" b="0" i="0">
+                <a:spcPts val="1178"/>
+              </a:spcAft>
+            </a:pPr>
+            <a:r>
+              <a:rPr sz="1900" b="0" i="0">
                 <a:solidFill>
                   <a:srgbClr val="242A33"/>
                 </a:solidFill>
@@ -13821,7 +13821,7 @@
               <a:t>•  </a:t>
             </a:r>
             <a:r>
-              <a:rPr sz="2000" b="1" i="0">
+              <a:rPr sz="1900" b="1" i="0">
                 <a:solidFill>
                   <a:srgbClr val="12395B"/>
                 </a:solidFill>
@@ -13831,7 +13831,7 @@
               <a:t>上机</a:t>
             </a:r>
             <a:r>
-              <a:rPr sz="2000" b="0" i="0">
+              <a:rPr sz="1900" b="0" i="0">
                 <a:solidFill>
                   <a:srgbClr val="242A33"/>
                 </a:solidFill>
@@ -13841,7 +13841,7 @@
               <a:t>　把 </a:t>
             </a:r>
             <a:r>
-              <a:rPr sz="1879" b="0" i="0">
+              <a:rPr sz="1786" b="0" i="0">
                 <a:solidFill>
                   <a:srgbClr val="242A33"/>
                 </a:solidFill>
@@ -13851,7 +13851,7 @@
               <a:t>IntSet</a:t>
             </a:r>
             <a:r>
-              <a:rPr sz="2000" b="0" i="0">
+              <a:rPr sz="1900" b="0" i="0">
                 <a:solidFill>
                   <a:srgbClr val="242A33"/>
                 </a:solidFill>
@@ -13861,7 +13861,7 @@
               <a:t> 的线性表换成散列表，</a:t>
             </a:r>
             <a:r>
-              <a:rPr sz="2000" b="1" i="0">
+              <a:rPr sz="1900" b="1" i="0">
                 <a:solidFill>
                   <a:srgbClr val="12395B"/>
                 </a:solidFill>
@@ -13871,7 +13871,7 @@
               <a:t>接口不变</a:t>
             </a:r>
             <a:r>
-              <a:rPr sz="2000" b="0" i="0">
+              <a:rPr sz="1900" b="0" i="0">
                 <a:solidFill>
                   <a:srgbClr val="242A33"/>
                 </a:solidFill>
@@ -13879,6 +13879,79 @@
                 <a:ea typeface="微软雅黑"/>
               </a:rPr>
               <a:t>，比较交集运算的耗时</a:t>
+            </a:r>
+          </a:p>
+          <a:p>
+            <a:pPr algn="l">
+              <a:lnSpc>
+                <a:spcPct val="132000"/>
+              </a:lnSpc>
+              <a:spcBef>
+                <a:spcPts val="0"/>
+              </a:spcBef>
+              <a:spcAft>
+                <a:spcPts val="1178"/>
+              </a:spcAft>
+            </a:pPr>
+            <a:r>
+              <a:rPr sz="1900" b="0" i="0">
+                <a:solidFill>
+                  <a:srgbClr val="242A33"/>
+                </a:solidFill>
+                <a:latin typeface="Segoe UI"/>
+                <a:ea typeface="微软雅黑"/>
+              </a:rPr>
+              <a:t>•  </a:t>
+            </a:r>
+            <a:r>
+              <a:rPr sz="1900" b="1" i="0">
+                <a:solidFill>
+                  <a:srgbClr val="12395B"/>
+                </a:solidFill>
+                <a:latin typeface="Segoe UI"/>
+                <a:ea typeface="微软雅黑"/>
+              </a:rPr>
+              <a:t>这一页和讲义里都是选讲。</a:t>
+            </a:r>
+            <a:r>
+              <a:rPr sz="1900" b="0" i="0">
+                <a:solidFill>
+                  <a:srgbClr val="242A33"/>
+                </a:solidFill>
+                <a:latin typeface="Segoe UI"/>
+                <a:ea typeface="微软雅黑"/>
+              </a:rPr>
+              <a:t> 原书全部 </a:t>
+            </a:r>
+            <a:r>
+              <a:rPr sz="1900" b="1" i="0">
+                <a:solidFill>
+                  <a:srgbClr val="12395B"/>
+                </a:solidFill>
+                <a:latin typeface="Segoe UI"/>
+                <a:ea typeface="微软雅黑"/>
+              </a:rPr>
+              <a:t>345 道</a:t>
+            </a:r>
+            <a:r>
+              <a:rPr sz="1900" b="0" i="0">
+                <a:solidFill>
+                  <a:srgbClr val="242A33"/>
+                </a:solidFill>
+                <a:latin typeface="Segoe UI"/>
+                <a:ea typeface="微软雅黑"/>
+              </a:rPr>
+              <a:t>习题与上机题的参考答案，在 </a:t>
+            </a:r>
+            <a:r>
+              <a:rPr sz="1786" b="0" i="0">
+                <a:solidFill>
+                  <a:srgbClr val="242A33"/>
+                </a:solidFill>
+                <a:latin typeface="Consolas"/>
+                <a:ea typeface="Consolas"/>
+              </a:rPr>
+              <a:t>book/习题与参考答案.md</a:t>
             </a:r>
           </a:p>
         </p:txBody>
